--- a/media/resources/BanktikEseptoolor/Statements-Noughts-Crosses.pptx
+++ b/media/resources/BanktikEseptoolor/Statements-Noughts-Crosses.pptx
@@ -4934,7 +4934,7 @@
             <a:pPr algn="ctr"/>
             <a:r>
               <a:rPr lang="en-GB" sz="2800" dirty="0"/>
-              <a:t>£862.16</a:t>
+              <a:t>£862,16</a:t>
             </a:r>
           </a:p>
         </p:txBody>
@@ -5426,7 +5426,7 @@
                             <a:sysClr val="windowText" lastClr="000000"/>
                           </a:solidFill>
                         </a:rPr>
-                        <a:t>45.61</a:t>
+                        <a:t>45,61</a:t>
                       </a:r>
                     </a:p>
                   </a:txBody>
@@ -5698,7 +5698,7 @@
                             <a:sysClr val="windowText" lastClr="000000"/>
                           </a:solidFill>
                         </a:rPr>
-                        <a:t>2.99</a:t>
+                        <a:t>2,99</a:t>
                       </a:r>
                     </a:p>
                   </a:txBody>
@@ -6126,7 +6126,7 @@
             <a:pPr algn="ctr"/>
             <a:r>
               <a:rPr lang="en-GB" sz="2800" dirty="0"/>
-              <a:t>£213.47</a:t>
+              <a:t>£213,47</a:t>
             </a:r>
           </a:p>
         </p:txBody>
@@ -9811,7 +9811,7 @@
                             <a:sysClr val="windowText" lastClr="000000"/>
                           </a:solidFill>
                         </a:rPr>
-                        <a:t>215.40</a:t>
+                        <a:t>215,40</a:t>
                       </a:r>
                     </a:p>
                   </a:txBody>
@@ -10428,7 +10428,7 @@
                             <a:sysClr val="windowText" lastClr="000000"/>
                           </a:solidFill>
                         </a:rPr>
-                        <a:t>512.50</a:t>
+                        <a:t>512,50</a:t>
                       </a:r>
                     </a:p>
                   </a:txBody>
@@ -10760,7 +10760,7 @@
                             <a:sysClr val="windowText" lastClr="000000"/>
                           </a:solidFill>
                         </a:rPr>
-                        <a:t>29.99</a:t>
+                        <a:t>29,99</a:t>
                       </a:r>
                     </a:p>
                   </a:txBody>
@@ -11579,7 +11579,7 @@
                             <a:sysClr val="windowText" lastClr="000000"/>
                           </a:solidFill>
                         </a:rPr>
-                        <a:t>143.45</a:t>
+                        <a:t>143,45</a:t>
                       </a:r>
                     </a:p>
                   </a:txBody>
@@ -11846,7 +11846,7 @@
                             <a:sysClr val="windowText" lastClr="000000"/>
                           </a:solidFill>
                         </a:rPr>
-                        <a:t>6.92</a:t>
+                        <a:t>6,92</a:t>
                       </a:r>
                     </a:p>
                   </a:txBody>
@@ -12178,7 +12178,7 @@
                             <a:sysClr val="windowText" lastClr="000000"/>
                           </a:solidFill>
                         </a:rPr>
-                        <a:t>56.72</a:t>
+                        <a:t>56,72</a:t>
                       </a:r>
                     </a:p>
                   </a:txBody>
@@ -12795,7 +12795,7 @@
                             <a:sysClr val="windowText" lastClr="000000"/>
                           </a:solidFill>
                         </a:rPr>
-                        <a:t>22.50</a:t>
+                        <a:t>22,50</a:t>
                       </a:r>
                     </a:p>
                   </a:txBody>
@@ -13329,7 +13329,7 @@
                             <a:sysClr val="windowText" lastClr="000000"/>
                           </a:solidFill>
                         </a:rPr>
-                        <a:t>8.75</a:t>
+                        <a:t>8,75</a:t>
                       </a:r>
                     </a:p>
                   </a:txBody>
@@ -13490,7 +13490,7 @@
             <a:pPr algn="ctr"/>
             <a:r>
               <a:rPr lang="en-GB" sz="2800" dirty="0"/>
-              <a:t>£1205.88</a:t>
+              <a:t>£1205,88</a:t>
             </a:r>
           </a:p>
         </p:txBody>
@@ -13526,7 +13526,7 @@
             <a:pPr algn="ctr"/>
             <a:r>
               <a:rPr lang="en-GB" sz="2800" dirty="0"/>
-              <a:t>£620.50</a:t>
+              <a:t>£620,50</a:t>
             </a:r>
           </a:p>
         </p:txBody>
